--- a/fiches_outils/Fiche_technique_SectionMill.pptx
+++ b/fiches_outils/Fiche_technique_SectionMill.pptx
@@ -3547,7 +3547,7 @@
         </p:nvSpPr>
         <p:spPr>
           <a:xfrm>
-            <a:off x="711200" y="5334000"/>
+            <a:off x="711200" y="5257800"/>
             <a:ext cx="6134100" cy="177800"/>
           </a:xfrm>
           <a:prstGeom prst="rect">
@@ -3590,7 +3590,7 @@
           <p:nvPr/>
         </p:nvGraphicFramePr>
         <p:xfrm>
-          <a:off x="711200" y="5537200"/>
+          <a:off x="711200" y="5461000"/>
           <a:ext cx="6134098" cy="1701800"/>
         </p:xfrm>
         <a:graphic>
@@ -7959,7 +7959,7 @@
         </p:nvSpPr>
         <p:spPr>
           <a:xfrm>
-            <a:off x="711200" y="7277100"/>
+            <a:off x="711200" y="7200900"/>
             <a:ext cx="6134100" cy="114300"/>
           </a:xfrm>
           <a:prstGeom prst="rect">
@@ -8001,7 +8001,7 @@
         </p:nvSpPr>
         <p:spPr>
           <a:xfrm>
-            <a:off x="711200" y="7594600"/>
+            <a:off x="711200" y="7467600"/>
             <a:ext cx="2921000" cy="177800"/>
           </a:xfrm>
           <a:prstGeom prst="rect">
@@ -8043,7 +8043,7 @@
         </p:nvSpPr>
         <p:spPr>
           <a:xfrm>
-            <a:off x="711200" y="7797800"/>
+            <a:off x="711200" y="7670800"/>
             <a:ext cx="2921000" cy="127000"/>
           </a:xfrm>
           <a:prstGeom prst="rect">
@@ -8342,7 +8342,7 @@
         </p:nvSpPr>
         <p:spPr>
           <a:xfrm>
-            <a:off x="3810000" y="7594600"/>
+            <a:off x="3810000" y="7467600"/>
             <a:ext cx="3035300" cy="177800"/>
           </a:xfrm>
           <a:prstGeom prst="rect">
@@ -8385,7 +8385,7 @@
           <p:nvPr/>
         </p:nvGraphicFramePr>
         <p:xfrm>
-          <a:off x="3810000" y="7785100"/>
+          <a:off x="3810000" y="7658100"/>
           <a:ext cx="3035300" cy="1318251"/>
         </p:xfrm>
         <a:graphic>
@@ -10049,7 +10049,7 @@
         </p:nvSpPr>
         <p:spPr>
           <a:xfrm>
-            <a:off x="3810000" y="9204960"/>
+            <a:off x="3810000" y="9077960"/>
             <a:ext cx="3035300" cy="177800"/>
           </a:xfrm>
           <a:prstGeom prst="rect">
@@ -10092,7 +10092,7 @@
           <p:nvPr/>
         </p:nvGraphicFramePr>
         <p:xfrm>
-          <a:off x="3810000" y="9382760"/>
+          <a:off x="3810000" y="9255760"/>
           <a:ext cx="3035300" cy="673100"/>
         </p:xfrm>
         <a:graphic>
@@ -10665,7 +10665,7 @@
         </p:nvSpPr>
         <p:spPr>
           <a:xfrm>
-            <a:off x="3810000" y="10157460"/>
+            <a:off x="3810000" y="10030460"/>
             <a:ext cx="3035300" cy="177800"/>
           </a:xfrm>
           <a:prstGeom prst="rect">
@@ -10707,7 +10707,7 @@
         </p:nvSpPr>
         <p:spPr>
           <a:xfrm>
-            <a:off x="3810000" y="10335260"/>
+            <a:off x="3810000" y="10208260"/>
             <a:ext cx="3035300" cy="381000"/>
           </a:xfrm>
           <a:prstGeom prst="rect">
